--- a/marketing/decks/phase-02-quality-engineering.pptx
+++ b/marketing/decks/phase-02-quality-engineering.pptx
@@ -2,31 +2,31 @@
 <file path=ppt/presentation.xml><?xml version="1.0" encoding="utf-8"?>
 <p:presentation xmlns:p="http://schemas.openxmlformats.org/presentationml/2006/main">
   <p:sldMasterIdLst>
-    <p:sldMasterId xmlns:r="http://schemas.openxmlformats.org/officeDocument/2006/relationships" id="2147483648" r:id="R30a079370c084596"/>
+    <p:sldMasterId xmlns:r="http://schemas.openxmlformats.org/officeDocument/2006/relationships" id="2147483648" r:id="Rf4c3dd4cf2394cd2"/>
   </p:sldMasterIdLst>
   <p:notesMasterIdLst>
-    <p:notesMasterId xmlns:r="http://schemas.openxmlformats.org/officeDocument/2006/relationships" r:id="Rf01790fc17354399"/>
+    <p:notesMasterId xmlns:r="http://schemas.openxmlformats.org/officeDocument/2006/relationships" r:id="Rf93f7a4d421b4e13"/>
   </p:notesMasterIdLst>
   <p:sldIdLst>
-    <p:sldId xmlns:r="http://schemas.openxmlformats.org/officeDocument/2006/relationships" id="256" r:id="R7dff66553a6a46b3"/>
-    <p:sldId xmlns:r="http://schemas.openxmlformats.org/officeDocument/2006/relationships" id="257" r:id="R74d0e78cdcb941df"/>
-    <p:sldId xmlns:r="http://schemas.openxmlformats.org/officeDocument/2006/relationships" id="258" r:id="R26ee56fb10094ecd"/>
-    <p:sldId xmlns:r="http://schemas.openxmlformats.org/officeDocument/2006/relationships" id="259" r:id="Radce22e0aa364056"/>
-    <p:sldId xmlns:r="http://schemas.openxmlformats.org/officeDocument/2006/relationships" id="260" r:id="R8e854fbac648479b"/>
-    <p:sldId xmlns:r="http://schemas.openxmlformats.org/officeDocument/2006/relationships" id="261" r:id="R4e6f331a2c5c4aaa"/>
-    <p:sldId xmlns:r="http://schemas.openxmlformats.org/officeDocument/2006/relationships" id="262" r:id="R394220541ddc4e5d"/>
-    <p:sldId xmlns:r="http://schemas.openxmlformats.org/officeDocument/2006/relationships" id="263" r:id="R5b6a6312c0da4b0d"/>
-    <p:sldId xmlns:r="http://schemas.openxmlformats.org/officeDocument/2006/relationships" id="264" r:id="R2aa703c8a56545d1"/>
-    <p:sldId xmlns:r="http://schemas.openxmlformats.org/officeDocument/2006/relationships" id="265" r:id="R17d6c0dbe27f4172"/>
-    <p:sldId xmlns:r="http://schemas.openxmlformats.org/officeDocument/2006/relationships" id="266" r:id="R2c21363020444e71"/>
-    <p:sldId xmlns:r="http://schemas.openxmlformats.org/officeDocument/2006/relationships" id="267" r:id="Rb00e2e76b72b4047"/>
-    <p:sldId xmlns:r="http://schemas.openxmlformats.org/officeDocument/2006/relationships" id="268" r:id="R2610170581794479"/>
-    <p:sldId xmlns:r="http://schemas.openxmlformats.org/officeDocument/2006/relationships" id="269" r:id="R0727b1a26c304fa1"/>
-    <p:sldId xmlns:r="http://schemas.openxmlformats.org/officeDocument/2006/relationships" id="270" r:id="Rd827cdd087bd4bae"/>
-    <p:sldId xmlns:r="http://schemas.openxmlformats.org/officeDocument/2006/relationships" id="271" r:id="R4f78dd9d63dd4391"/>
-    <p:sldId xmlns:r="http://schemas.openxmlformats.org/officeDocument/2006/relationships" id="272" r:id="R0947ec912af74684"/>
-    <p:sldId xmlns:r="http://schemas.openxmlformats.org/officeDocument/2006/relationships" id="273" r:id="R2e48fe4fad27489e"/>
-    <p:sldId xmlns:r="http://schemas.openxmlformats.org/officeDocument/2006/relationships" id="274" r:id="R26d528c1437d4bcb"/>
+    <p:sldId xmlns:r="http://schemas.openxmlformats.org/officeDocument/2006/relationships" id="256" r:id="Rf8bf481d02844602"/>
+    <p:sldId xmlns:r="http://schemas.openxmlformats.org/officeDocument/2006/relationships" id="257" r:id="R1c18060758554458"/>
+    <p:sldId xmlns:r="http://schemas.openxmlformats.org/officeDocument/2006/relationships" id="258" r:id="R636243495b4b4461"/>
+    <p:sldId xmlns:r="http://schemas.openxmlformats.org/officeDocument/2006/relationships" id="259" r:id="R1bfbde4fe4344dd6"/>
+    <p:sldId xmlns:r="http://schemas.openxmlformats.org/officeDocument/2006/relationships" id="260" r:id="Rd3d8f95fd1fc4984"/>
+    <p:sldId xmlns:r="http://schemas.openxmlformats.org/officeDocument/2006/relationships" id="261" r:id="Rc53a0f3781024e66"/>
+    <p:sldId xmlns:r="http://schemas.openxmlformats.org/officeDocument/2006/relationships" id="262" r:id="Rcc49ab8cb49a4907"/>
+    <p:sldId xmlns:r="http://schemas.openxmlformats.org/officeDocument/2006/relationships" id="263" r:id="R1e537dc1c1f2423f"/>
+    <p:sldId xmlns:r="http://schemas.openxmlformats.org/officeDocument/2006/relationships" id="264" r:id="R441a2e8d88e542b0"/>
+    <p:sldId xmlns:r="http://schemas.openxmlformats.org/officeDocument/2006/relationships" id="265" r:id="R0250f9acbb3c443e"/>
+    <p:sldId xmlns:r="http://schemas.openxmlformats.org/officeDocument/2006/relationships" id="266" r:id="Rc234d96061d9420c"/>
+    <p:sldId xmlns:r="http://schemas.openxmlformats.org/officeDocument/2006/relationships" id="267" r:id="R109fc624888b4188"/>
+    <p:sldId xmlns:r="http://schemas.openxmlformats.org/officeDocument/2006/relationships" id="268" r:id="R35a538f599d14b6f"/>
+    <p:sldId xmlns:r="http://schemas.openxmlformats.org/officeDocument/2006/relationships" id="269" r:id="R92bdce305964412b"/>
+    <p:sldId xmlns:r="http://schemas.openxmlformats.org/officeDocument/2006/relationships" id="270" r:id="Rfe83ecd40c114022"/>
+    <p:sldId xmlns:r="http://schemas.openxmlformats.org/officeDocument/2006/relationships" id="271" r:id="R57f5d4655c314d94"/>
+    <p:sldId xmlns:r="http://schemas.openxmlformats.org/officeDocument/2006/relationships" id="272" r:id="R40d1a5aa24d4482d"/>
+    <p:sldId xmlns:r="http://schemas.openxmlformats.org/officeDocument/2006/relationships" id="273" r:id="R71cbab1aaa7943de"/>
+    <p:sldId xmlns:r="http://schemas.openxmlformats.org/officeDocument/2006/relationships" id="274" r:id="R8e8f371e53c0425a"/>
   </p:sldIdLst>
   <p:sldSz cx="12192000" cy="6858000"/>
   <p:notesSz cx="6858000" cy="9144000"/>
@@ -4699,17 +4699,17 @@
   </p:cSld>
   <p:clrMap bg1="lt1" tx1="dk1" bg2="lt2" tx2="dk2" accent1="accent1" accent2="accent2" accent3="accent3" accent4="accent4" accent5="accent5" accent6="accent6" hlink="hlink" folHlink="folHlink"/>
   <p:sldLayoutIdLst>
-    <p:sldLayoutId xmlns:r="http://schemas.openxmlformats.org/officeDocument/2006/relationships" id="2147483649" r:id="R424f7f3e330b4a83"/>
-    <p:sldLayoutId xmlns:r="http://schemas.openxmlformats.org/officeDocument/2006/relationships" id="2147483650" r:id="R598fb1941cb3436a"/>
-    <p:sldLayoutId xmlns:r="http://schemas.openxmlformats.org/officeDocument/2006/relationships" id="2147483651" r:id="R741bf9da32824afb"/>
-    <p:sldLayoutId xmlns:r="http://schemas.openxmlformats.org/officeDocument/2006/relationships" id="2147483652" r:id="R5e0fd860781044d6"/>
-    <p:sldLayoutId xmlns:r="http://schemas.openxmlformats.org/officeDocument/2006/relationships" id="2147483653" r:id="Re577134c4dce414f"/>
-    <p:sldLayoutId xmlns:r="http://schemas.openxmlformats.org/officeDocument/2006/relationships" id="2147483654" r:id="R3494143900e4401a"/>
-    <p:sldLayoutId xmlns:r="http://schemas.openxmlformats.org/officeDocument/2006/relationships" id="2147483655" r:id="Re947e04267b14489"/>
-    <p:sldLayoutId xmlns:r="http://schemas.openxmlformats.org/officeDocument/2006/relationships" id="2147483656" r:id="Rfc45f316cf67444d"/>
-    <p:sldLayoutId xmlns:r="http://schemas.openxmlformats.org/officeDocument/2006/relationships" id="2147483657" r:id="R6220512644fa4167"/>
-    <p:sldLayoutId xmlns:r="http://schemas.openxmlformats.org/officeDocument/2006/relationships" id="2147483658" r:id="R00289ac3ed1941df"/>
-    <p:sldLayoutId xmlns:r="http://schemas.openxmlformats.org/officeDocument/2006/relationships" id="2147483659" r:id="Re1ca201c61fe4630"/>
+    <p:sldLayoutId xmlns:r="http://schemas.openxmlformats.org/officeDocument/2006/relationships" id="2147483649" r:id="Re830626c9a384afa"/>
+    <p:sldLayoutId xmlns:r="http://schemas.openxmlformats.org/officeDocument/2006/relationships" id="2147483650" r:id="R3cd80f5ab3df4d59"/>
+    <p:sldLayoutId xmlns:r="http://schemas.openxmlformats.org/officeDocument/2006/relationships" id="2147483651" r:id="R1fb8d6839d0a49e4"/>
+    <p:sldLayoutId xmlns:r="http://schemas.openxmlformats.org/officeDocument/2006/relationships" id="2147483652" r:id="R0189b8157ba04890"/>
+    <p:sldLayoutId xmlns:r="http://schemas.openxmlformats.org/officeDocument/2006/relationships" id="2147483653" r:id="R608aba294dfd49b8"/>
+    <p:sldLayoutId xmlns:r="http://schemas.openxmlformats.org/officeDocument/2006/relationships" id="2147483654" r:id="R81e8ca5eb1c049e1"/>
+    <p:sldLayoutId xmlns:r="http://schemas.openxmlformats.org/officeDocument/2006/relationships" id="2147483655" r:id="Rd8cc3ab18aea48f1"/>
+    <p:sldLayoutId xmlns:r="http://schemas.openxmlformats.org/officeDocument/2006/relationships" id="2147483656" r:id="R4f3c10a8e767488c"/>
+    <p:sldLayoutId xmlns:r="http://schemas.openxmlformats.org/officeDocument/2006/relationships" id="2147483657" r:id="Rbed8ead02ad64a1b"/>
+    <p:sldLayoutId xmlns:r="http://schemas.openxmlformats.org/officeDocument/2006/relationships" id="2147483658" r:id="R972260426ae24c99"/>
+    <p:sldLayoutId xmlns:r="http://schemas.openxmlformats.org/officeDocument/2006/relationships" id="2147483659" r:id="R328a438189a6443c"/>
   </p:sldLayoutIdLst>
   <p:txStyles>
     <p:titleStyle>
@@ -6793,10 +6793,14 @@
           <a:lstStyle xmlns:a="http://schemas.openxmlformats.org/drawingml/2006/main"/>
           <a:p xmlns:a="http://schemas.openxmlformats.org/drawingml/2006/main">
             <a:pPr algn="l">
-              <a:buNone/>
-            </a:pPr>
-            <a:r>
-              <a:rPr sz="3750" b="1">
+              <a:lnSpc>
+                <a:spcPct val="98000"/>
+              </a:lnSpc>
+              <a:buNone/>
+              <a:defRPr sz="3525" b="1"/>
+            </a:pPr>
+            <a:r>
+              <a:rPr sz="3525" b="1">
                 <a:solidFill>
                   <a:srgbClr val="000000"/>
                 </a:solidFill>
@@ -6895,10 +6899,14 @@
           <a:lstStyle xmlns:a="http://schemas.openxmlformats.org/drawingml/2006/main"/>
           <a:p xmlns:a="http://schemas.openxmlformats.org/drawingml/2006/main">
             <a:pPr algn="ctr">
-              <a:buNone/>
-            </a:pPr>
-            <a:r>
-              <a:rPr sz="2000" b="1">
+              <a:lnSpc>
+                <a:spcPct val="108000"/>
+              </a:lnSpc>
+              <a:buNone/>
+              <a:defRPr sz="1350" b="0"/>
+            </a:pPr>
+            <a:r>
+              <a:rPr sz="1350" b="0">
                 <a:solidFill>
                   <a:srgbClr val="000000"/>
                 </a:solidFill>
@@ -7038,7 +7046,7 @@
         <p:spPr>
           <a:xfrm xmlns:a="http://schemas.openxmlformats.org/drawingml/2006/main">
             <a:off x="5200650" y="4018550"/>
-            <a:ext cx="1790700" cy="400050"/>
+            <a:ext cx="1790700" cy="469087"/>
           </a:xfrm>
           <a:prstGeom xmlns:a="http://schemas.openxmlformats.org/drawingml/2006/main" prst="rect">
             <a:avLst/>
@@ -7052,10 +7060,14 @@
           <a:lstStyle xmlns:a="http://schemas.openxmlformats.org/drawingml/2006/main"/>
           <a:p xmlns:a="http://schemas.openxmlformats.org/drawingml/2006/main">
             <a:pPr algn="ctr">
-              <a:buNone/>
-            </a:pPr>
-            <a:r>
-              <a:rPr sz="2000" b="1">
+              <a:lnSpc>
+                <a:spcPct val="108000"/>
+              </a:lnSpc>
+              <a:buNone/>
+              <a:defRPr sz="1425" b="1"/>
+            </a:pPr>
+            <a:r>
+              <a:rPr sz="1425" b="1">
                 <a:solidFill>
                   <a:srgbClr val="000000"/>
                 </a:solidFill>
@@ -7195,7 +7207,7 @@
         <p:spPr>
           <a:xfrm xmlns:a="http://schemas.openxmlformats.org/drawingml/2006/main">
             <a:off x="7791450" y="4018550"/>
-            <a:ext cx="1790700" cy="400050"/>
+            <a:ext cx="1790700" cy="444398"/>
           </a:xfrm>
           <a:prstGeom xmlns:a="http://schemas.openxmlformats.org/drawingml/2006/main" prst="rect">
             <a:avLst/>
@@ -7209,10 +7221,14 @@
           <a:lstStyle xmlns:a="http://schemas.openxmlformats.org/drawingml/2006/main"/>
           <a:p xmlns:a="http://schemas.openxmlformats.org/drawingml/2006/main">
             <a:pPr algn="ctr">
-              <a:buNone/>
-            </a:pPr>
-            <a:r>
-              <a:rPr sz="2000" b="1">
+              <a:lnSpc>
+                <a:spcPct val="108000"/>
+              </a:lnSpc>
+              <a:buNone/>
+              <a:defRPr sz="1350" b="0"/>
+            </a:pPr>
+            <a:r>
+              <a:rPr sz="1350" b="0">
                 <a:solidFill>
                   <a:srgbClr val="000000"/>
                 </a:solidFill>
@@ -7241,8 +7257,8 @@
         </p:nvSpPr>
         <p:spPr>
           <a:xfrm xmlns:a="http://schemas.openxmlformats.org/drawingml/2006/main">
-            <a:off x="1676400" y="5181600"/>
-            <a:ext cx="8839200" cy="600075"/>
+            <a:off x="1676400" y="5448300"/>
+            <a:ext cx="8839200" cy="457200"/>
           </a:xfrm>
           <a:prstGeom xmlns:a="http://schemas.openxmlformats.org/drawingml/2006/main" prst="rect">
             <a:avLst/>
@@ -7256,10 +7272,14 @@
           <a:lstStyle xmlns:a="http://schemas.openxmlformats.org/drawingml/2006/main"/>
           <a:p xmlns:a="http://schemas.openxmlformats.org/drawingml/2006/main">
             <a:pPr algn="ctr">
-              <a:buNone/>
-            </a:pPr>
-            <a:r>
-              <a:rPr sz="2100" b="1">
+              <a:lnSpc>
+                <a:spcPct val="105000"/>
+              </a:lnSpc>
+              <a:buNone/>
+              <a:defRPr sz="1500"/>
+            </a:pPr>
+            <a:r>
+              <a:rPr sz="1500" b="1">
                 <a:solidFill>
                   <a:srgbClr val="000000"/>
                 </a:solidFill>
@@ -9171,10 +9191,14 @@
           <a:lstStyle xmlns:a="http://schemas.openxmlformats.org/drawingml/2006/main"/>
           <a:p xmlns:a="http://schemas.openxmlformats.org/drawingml/2006/main">
             <a:pPr algn="l">
-              <a:buNone/>
-            </a:pPr>
-            <a:r>
-              <a:rPr sz="3750" b="1">
+              <a:lnSpc>
+                <a:spcPct val="98000"/>
+              </a:lnSpc>
+              <a:buNone/>
+              <a:defRPr sz="3525" b="1"/>
+            </a:pPr>
+            <a:r>
+              <a:rPr sz="3525" b="1">
                 <a:solidFill>
                   <a:srgbClr val="000000"/>
                 </a:solidFill>
@@ -9273,10 +9297,14 @@
           <a:lstStyle xmlns:a="http://schemas.openxmlformats.org/drawingml/2006/main"/>
           <a:p xmlns:a="http://schemas.openxmlformats.org/drawingml/2006/main">
             <a:pPr algn="l">
-              <a:buNone/>
-            </a:pPr>
-            <a:r>
-              <a:rPr sz="2250" b="1">
+              <a:lnSpc>
+                <a:spcPct val="108000"/>
+              </a:lnSpc>
+              <a:buNone/>
+              <a:defRPr sz="1725" b="1"/>
+            </a:pPr>
+            <a:r>
+              <a:rPr sz="1725" b="1">
                 <a:solidFill>
                   <a:srgbClr val="000000"/>
                 </a:solidFill>
@@ -9320,10 +9348,14 @@
           <a:lstStyle xmlns:a="http://schemas.openxmlformats.org/drawingml/2006/main"/>
           <a:p xmlns:a="http://schemas.openxmlformats.org/drawingml/2006/main">
             <a:pPr algn="l">
-              <a:buNone/>
-            </a:pPr>
-            <a:r>
-              <a:rPr sz="1575" b="1">
+              <a:lnSpc>
+                <a:spcPct val="108000"/>
+              </a:lnSpc>
+              <a:buNone/>
+              <a:defRPr sz="1350" b="0"/>
+            </a:pPr>
+            <a:r>
+              <a:rPr sz="1350" b="0">
                 <a:solidFill>
                   <a:srgbClr val="3D8DFF"/>
                 </a:solidFill>
@@ -9367,10 +9399,14 @@
           <a:lstStyle xmlns:a="http://schemas.openxmlformats.org/drawingml/2006/main"/>
           <a:p xmlns:a="http://schemas.openxmlformats.org/drawingml/2006/main">
             <a:pPr algn="l">
-              <a:buNone/>
-            </a:pPr>
-            <a:r>
-              <a:rPr sz="1575" b="0">
+              <a:lnSpc>
+                <a:spcPct val="108000"/>
+              </a:lnSpc>
+              <a:buNone/>
+              <a:defRPr sz="1350" b="0"/>
+            </a:pPr>
+            <a:r>
+              <a:rPr sz="1350" b="0">
                 <a:solidFill>
                   <a:srgbClr val="000000"/>
                 </a:solidFill>
@@ -9414,10 +9450,14 @@
           <a:lstStyle xmlns:a="http://schemas.openxmlformats.org/drawingml/2006/main"/>
           <a:p xmlns:a="http://schemas.openxmlformats.org/drawingml/2006/main">
             <a:pPr algn="l">
-              <a:buNone/>
-            </a:pPr>
-            <a:r>
-              <a:rPr sz="1575" b="1">
+              <a:lnSpc>
+                <a:spcPct val="108000"/>
+              </a:lnSpc>
+              <a:buNone/>
+              <a:defRPr sz="1350" b="0"/>
+            </a:pPr>
+            <a:r>
+              <a:rPr sz="1350" b="0">
                 <a:solidFill>
                   <a:srgbClr val="3D8DFF"/>
                 </a:solidFill>
@@ -9461,10 +9501,14 @@
           <a:lstStyle xmlns:a="http://schemas.openxmlformats.org/drawingml/2006/main"/>
           <a:p xmlns:a="http://schemas.openxmlformats.org/drawingml/2006/main">
             <a:pPr algn="l">
-              <a:buNone/>
-            </a:pPr>
-            <a:r>
-              <a:rPr sz="1575" b="0">
+              <a:lnSpc>
+                <a:spcPct val="108000"/>
+              </a:lnSpc>
+              <a:buNone/>
+              <a:defRPr sz="1350" b="0"/>
+            </a:pPr>
+            <a:r>
+              <a:rPr sz="1350" b="0">
                 <a:solidFill>
                   <a:srgbClr val="000000"/>
                 </a:solidFill>
@@ -9508,10 +9552,14 @@
           <a:lstStyle xmlns:a="http://schemas.openxmlformats.org/drawingml/2006/main"/>
           <a:p xmlns:a="http://schemas.openxmlformats.org/drawingml/2006/main">
             <a:pPr algn="l">
-              <a:buNone/>
-            </a:pPr>
-            <a:r>
-              <a:rPr sz="1575" b="1">
+              <a:lnSpc>
+                <a:spcPct val="108000"/>
+              </a:lnSpc>
+              <a:buNone/>
+              <a:defRPr sz="1350" b="0"/>
+            </a:pPr>
+            <a:r>
+              <a:rPr sz="1350" b="0">
                 <a:solidFill>
                   <a:srgbClr val="3D8DFF"/>
                 </a:solidFill>
@@ -9555,10 +9603,14 @@
           <a:lstStyle xmlns:a="http://schemas.openxmlformats.org/drawingml/2006/main"/>
           <a:p xmlns:a="http://schemas.openxmlformats.org/drawingml/2006/main">
             <a:pPr algn="l">
-              <a:buNone/>
-            </a:pPr>
-            <a:r>
-              <a:rPr sz="1575" b="0">
+              <a:lnSpc>
+                <a:spcPct val="108000"/>
+              </a:lnSpc>
+              <a:buNone/>
+              <a:defRPr sz="1350" b="0"/>
+            </a:pPr>
+            <a:r>
+              <a:rPr sz="1350" b="0">
                 <a:solidFill>
                   <a:srgbClr val="000000"/>
                 </a:solidFill>
@@ -9657,10 +9709,14 @@
           <a:lstStyle xmlns:a="http://schemas.openxmlformats.org/drawingml/2006/main"/>
           <a:p xmlns:a="http://schemas.openxmlformats.org/drawingml/2006/main">
             <a:pPr algn="l">
-              <a:buNone/>
-            </a:pPr>
-            <a:r>
-              <a:rPr sz="2250" b="1">
+              <a:lnSpc>
+                <a:spcPct val="108000"/>
+              </a:lnSpc>
+              <a:buNone/>
+              <a:defRPr sz="1725" b="1"/>
+            </a:pPr>
+            <a:r>
+              <a:rPr sz="1725" b="1">
                 <a:solidFill>
                   <a:srgbClr val="000000"/>
                 </a:solidFill>
@@ -9704,10 +9760,14 @@
           <a:lstStyle xmlns:a="http://schemas.openxmlformats.org/drawingml/2006/main"/>
           <a:p xmlns:a="http://schemas.openxmlformats.org/drawingml/2006/main">
             <a:pPr algn="l">
-              <a:buNone/>
-            </a:pPr>
-            <a:r>
-              <a:rPr sz="1575" b="1">
+              <a:lnSpc>
+                <a:spcPct val="108000"/>
+              </a:lnSpc>
+              <a:buNone/>
+              <a:defRPr sz="1350" b="0"/>
+            </a:pPr>
+            <a:r>
+              <a:rPr sz="1350" b="0">
                 <a:solidFill>
                   <a:srgbClr val="3D8DFF"/>
                 </a:solidFill>
@@ -9751,10 +9811,14 @@
           <a:lstStyle xmlns:a="http://schemas.openxmlformats.org/drawingml/2006/main"/>
           <a:p xmlns:a="http://schemas.openxmlformats.org/drawingml/2006/main">
             <a:pPr algn="l">
-              <a:buNone/>
-            </a:pPr>
-            <a:r>
-              <a:rPr sz="1575" b="0">
+              <a:lnSpc>
+                <a:spcPct val="108000"/>
+              </a:lnSpc>
+              <a:buNone/>
+              <a:defRPr sz="1350" b="0"/>
+            </a:pPr>
+            <a:r>
+              <a:rPr sz="1350" b="0">
                 <a:solidFill>
                   <a:srgbClr val="000000"/>
                 </a:solidFill>
@@ -9798,10 +9862,14 @@
           <a:lstStyle xmlns:a="http://schemas.openxmlformats.org/drawingml/2006/main"/>
           <a:p xmlns:a="http://schemas.openxmlformats.org/drawingml/2006/main">
             <a:pPr algn="l">
-              <a:buNone/>
-            </a:pPr>
-            <a:r>
-              <a:rPr sz="1575" b="1">
+              <a:lnSpc>
+                <a:spcPct val="108000"/>
+              </a:lnSpc>
+              <a:buNone/>
+              <a:defRPr sz="1350" b="0"/>
+            </a:pPr>
+            <a:r>
+              <a:rPr sz="1350" b="0">
                 <a:solidFill>
                   <a:srgbClr val="3D8DFF"/>
                 </a:solidFill>
@@ -9845,10 +9913,14 @@
           <a:lstStyle xmlns:a="http://schemas.openxmlformats.org/drawingml/2006/main"/>
           <a:p xmlns:a="http://schemas.openxmlformats.org/drawingml/2006/main">
             <a:pPr algn="l">
-              <a:buNone/>
-            </a:pPr>
-            <a:r>
-              <a:rPr sz="1575" b="0">
+              <a:lnSpc>
+                <a:spcPct val="108000"/>
+              </a:lnSpc>
+              <a:buNone/>
+              <a:defRPr sz="1350" b="0"/>
+            </a:pPr>
+            <a:r>
+              <a:rPr sz="1350" b="0">
                 <a:solidFill>
                   <a:srgbClr val="000000"/>
                 </a:solidFill>
@@ -9892,10 +9964,14 @@
           <a:lstStyle xmlns:a="http://schemas.openxmlformats.org/drawingml/2006/main"/>
           <a:p xmlns:a="http://schemas.openxmlformats.org/drawingml/2006/main">
             <a:pPr algn="l">
-              <a:buNone/>
-            </a:pPr>
-            <a:r>
-              <a:rPr sz="1575" b="1">
+              <a:lnSpc>
+                <a:spcPct val="108000"/>
+              </a:lnSpc>
+              <a:buNone/>
+              <a:defRPr sz="1350" b="0"/>
+            </a:pPr>
+            <a:r>
+              <a:rPr sz="1350" b="0">
                 <a:solidFill>
                   <a:srgbClr val="3D8DFF"/>
                 </a:solidFill>
@@ -9939,10 +10015,14 @@
           <a:lstStyle xmlns:a="http://schemas.openxmlformats.org/drawingml/2006/main"/>
           <a:p xmlns:a="http://schemas.openxmlformats.org/drawingml/2006/main">
             <a:pPr algn="l">
-              <a:buNone/>
-            </a:pPr>
-            <a:r>
-              <a:rPr sz="1575" b="0">
+              <a:lnSpc>
+                <a:spcPct val="108000"/>
+              </a:lnSpc>
+              <a:buNone/>
+              <a:defRPr sz="1350" b="0"/>
+            </a:pPr>
+            <a:r>
+              <a:rPr sz="1350" b="0">
                 <a:solidFill>
                   <a:srgbClr val="000000"/>
                 </a:solidFill>
@@ -9971,8 +10051,8 @@
         </p:nvSpPr>
         <p:spPr>
           <a:xfrm xmlns:a="http://schemas.openxmlformats.org/drawingml/2006/main">
-            <a:off x="1676400" y="5181600"/>
-            <a:ext cx="8839200" cy="600075"/>
+            <a:off x="1676400" y="5448300"/>
+            <a:ext cx="8839200" cy="457200"/>
           </a:xfrm>
           <a:prstGeom xmlns:a="http://schemas.openxmlformats.org/drawingml/2006/main" prst="rect">
             <a:avLst/>
@@ -9986,10 +10066,14 @@
           <a:lstStyle xmlns:a="http://schemas.openxmlformats.org/drawingml/2006/main"/>
           <a:p xmlns:a="http://schemas.openxmlformats.org/drawingml/2006/main">
             <a:pPr algn="ctr">
-              <a:buNone/>
-            </a:pPr>
-            <a:r>
-              <a:rPr sz="2100" b="1">
+              <a:lnSpc>
+                <a:spcPct val="105000"/>
+              </a:lnSpc>
+              <a:buNone/>
+              <a:defRPr sz="1500"/>
+            </a:pPr>
+            <a:r>
+              <a:rPr sz="1500" b="1">
                 <a:solidFill>
                   <a:srgbClr val="000000"/>
                 </a:solidFill>
@@ -10149,10 +10233,14 @@
           <a:lstStyle xmlns:a="http://schemas.openxmlformats.org/drawingml/2006/main"/>
           <a:p xmlns:a="http://schemas.openxmlformats.org/drawingml/2006/main">
             <a:pPr algn="l">
-              <a:buNone/>
-            </a:pPr>
-            <a:r>
-              <a:rPr sz="3750" b="1">
+              <a:lnSpc>
+                <a:spcPct val="98000"/>
+              </a:lnSpc>
+              <a:buNone/>
+              <a:defRPr sz="3525" b="1"/>
+            </a:pPr>
+            <a:r>
+              <a:rPr sz="3525" b="1">
                 <a:solidFill>
                   <a:srgbClr val="000000"/>
                 </a:solidFill>
@@ -10196,10 +10284,14 @@
           <a:lstStyle xmlns:a="http://schemas.openxmlformats.org/drawingml/2006/main"/>
           <a:p xmlns:a="http://schemas.openxmlformats.org/drawingml/2006/main">
             <a:pPr algn="l">
-              <a:buNone/>
-            </a:pPr>
-            <a:r>
-              <a:rPr sz="2100" b="1">
+              <a:lnSpc>
+                <a:spcPct val="108000"/>
+              </a:lnSpc>
+              <a:buNone/>
+              <a:defRPr sz="1725" b="1"/>
+            </a:pPr>
+            <a:r>
+              <a:rPr sz="1725" b="1">
                 <a:solidFill>
                   <a:srgbClr val="000000"/>
                 </a:solidFill>
@@ -10290,10 +10382,14 @@
           <a:lstStyle xmlns:a="http://schemas.openxmlformats.org/drawingml/2006/main"/>
           <a:p xmlns:a="http://schemas.openxmlformats.org/drawingml/2006/main">
             <a:pPr algn="l">
-              <a:buNone/>
-            </a:pPr>
-            <a:r>
-              <a:rPr sz="2100" b="1">
+              <a:lnSpc>
+                <a:spcPct val="108000"/>
+              </a:lnSpc>
+              <a:buNone/>
+              <a:defRPr sz="1725" b="1"/>
+            </a:pPr>
+            <a:r>
+              <a:rPr sz="1725" b="1">
                 <a:solidFill>
                   <a:srgbClr val="000000"/>
                 </a:solidFill>
@@ -10384,10 +10480,14 @@
           <a:lstStyle xmlns:a="http://schemas.openxmlformats.org/drawingml/2006/main"/>
           <a:p xmlns:a="http://schemas.openxmlformats.org/drawingml/2006/main">
             <a:pPr algn="l">
-              <a:buNone/>
-            </a:pPr>
-            <a:r>
-              <a:rPr sz="2100" b="1">
+              <a:lnSpc>
+                <a:spcPct val="108000"/>
+              </a:lnSpc>
+              <a:buNone/>
+              <a:defRPr sz="1350" b="0"/>
+            </a:pPr>
+            <a:r>
+              <a:rPr sz="1350" b="0">
                 <a:solidFill>
                   <a:srgbClr val="000000"/>
                 </a:solidFill>
@@ -10431,10 +10531,14 @@
           <a:lstStyle xmlns:a="http://schemas.openxmlformats.org/drawingml/2006/main"/>
           <a:p xmlns:a="http://schemas.openxmlformats.org/drawingml/2006/main">
             <a:pPr algn="l">
-              <a:buNone/>
-            </a:pPr>
-            <a:r>
-              <a:rPr sz="1650" b="0">
+              <a:lnSpc>
+                <a:spcPct val="112000"/>
+              </a:lnSpc>
+              <a:buNone/>
+              <a:defRPr sz="1350"/>
+            </a:pPr>
+            <a:r>
+              <a:rPr sz="1350" b="0">
                 <a:solidFill>
                   <a:srgbClr val="60646C"/>
                 </a:solidFill>
@@ -10478,10 +10582,14 @@
           <a:lstStyle xmlns:a="http://schemas.openxmlformats.org/drawingml/2006/main"/>
           <a:p xmlns:a="http://schemas.openxmlformats.org/drawingml/2006/main">
             <a:pPr algn="l">
-              <a:buNone/>
-            </a:pPr>
-            <a:r>
-              <a:rPr sz="2100" b="1">
+              <a:lnSpc>
+                <a:spcPct val="108000"/>
+              </a:lnSpc>
+              <a:buNone/>
+              <a:defRPr sz="1350" b="0"/>
+            </a:pPr>
+            <a:r>
+              <a:rPr sz="1350" b="0">
                 <a:solidFill>
                   <a:srgbClr val="000000"/>
                 </a:solidFill>
@@ -10525,10 +10633,14 @@
           <a:lstStyle xmlns:a="http://schemas.openxmlformats.org/drawingml/2006/main"/>
           <a:p xmlns:a="http://schemas.openxmlformats.org/drawingml/2006/main">
             <a:pPr algn="l">
-              <a:buNone/>
-            </a:pPr>
-            <a:r>
-              <a:rPr sz="1650" b="0">
+              <a:lnSpc>
+                <a:spcPct val="112000"/>
+              </a:lnSpc>
+              <a:buNone/>
+              <a:defRPr sz="1350"/>
+            </a:pPr>
+            <a:r>
+              <a:rPr sz="1350" b="0">
                 <a:solidFill>
                   <a:srgbClr val="60646C"/>
                 </a:solidFill>
@@ -10557,8 +10669,8 @@
         </p:nvSpPr>
         <p:spPr>
           <a:xfrm xmlns:a="http://schemas.openxmlformats.org/drawingml/2006/main">
-            <a:off x="1676400" y="5181600"/>
-            <a:ext cx="8839200" cy="600075"/>
+            <a:off x="1676400" y="5448300"/>
+            <a:ext cx="8839200" cy="457200"/>
           </a:xfrm>
           <a:prstGeom xmlns:a="http://schemas.openxmlformats.org/drawingml/2006/main" prst="rect">
             <a:avLst/>
@@ -10572,10 +10684,14 @@
           <a:lstStyle xmlns:a="http://schemas.openxmlformats.org/drawingml/2006/main"/>
           <a:p xmlns:a="http://schemas.openxmlformats.org/drawingml/2006/main">
             <a:pPr algn="ctr">
-              <a:buNone/>
-            </a:pPr>
-            <a:r>
-              <a:rPr sz="2100" b="1">
+              <a:lnSpc>
+                <a:spcPct val="105000"/>
+              </a:lnSpc>
+              <a:buNone/>
+              <a:defRPr sz="1500"/>
+            </a:pPr>
+            <a:r>
+              <a:rPr sz="1500" b="1">
                 <a:solidFill>
                   <a:srgbClr val="000000"/>
                 </a:solidFill>
@@ -11832,10 +11948,14 @@
           <a:lstStyle xmlns:a="http://schemas.openxmlformats.org/drawingml/2006/main"/>
           <a:p xmlns:a="http://schemas.openxmlformats.org/drawingml/2006/main">
             <a:pPr algn="l">
-              <a:buNone/>
-            </a:pPr>
-            <a:r>
-              <a:rPr sz="3750" b="1">
+              <a:lnSpc>
+                <a:spcPct val="98000"/>
+              </a:lnSpc>
+              <a:buNone/>
+              <a:defRPr sz="3525" b="1"/>
+            </a:pPr>
+            <a:r>
+              <a:rPr sz="3525" b="1">
                 <a:solidFill>
                   <a:srgbClr val="000000"/>
                 </a:solidFill>
@@ -11934,10 +12054,14 @@
           <a:lstStyle xmlns:a="http://schemas.openxmlformats.org/drawingml/2006/main"/>
           <a:p xmlns:a="http://schemas.openxmlformats.org/drawingml/2006/main">
             <a:pPr algn="l">
-              <a:buNone/>
-            </a:pPr>
-            <a:r>
-              <a:rPr sz="2250" b="1">
+              <a:lnSpc>
+                <a:spcPct val="108000"/>
+              </a:lnSpc>
+              <a:buNone/>
+              <a:defRPr sz="1725" b="1"/>
+            </a:pPr>
+            <a:r>
+              <a:rPr sz="1725" b="1">
                 <a:solidFill>
                   <a:srgbClr val="000000"/>
                 </a:solidFill>
@@ -11981,10 +12105,14 @@
           <a:lstStyle xmlns:a="http://schemas.openxmlformats.org/drawingml/2006/main"/>
           <a:p xmlns:a="http://schemas.openxmlformats.org/drawingml/2006/main">
             <a:pPr algn="l">
-              <a:buNone/>
-            </a:pPr>
-            <a:r>
-              <a:rPr sz="1575" b="1">
+              <a:lnSpc>
+                <a:spcPct val="108000"/>
+              </a:lnSpc>
+              <a:buNone/>
+              <a:defRPr sz="1350" b="0"/>
+            </a:pPr>
+            <a:r>
+              <a:rPr sz="1350" b="0">
                 <a:solidFill>
                   <a:srgbClr val="3D8DFF"/>
                 </a:solidFill>
@@ -12028,10 +12156,14 @@
           <a:lstStyle xmlns:a="http://schemas.openxmlformats.org/drawingml/2006/main"/>
           <a:p xmlns:a="http://schemas.openxmlformats.org/drawingml/2006/main">
             <a:pPr algn="l">
-              <a:buNone/>
-            </a:pPr>
-            <a:r>
-              <a:rPr sz="1575" b="0">
+              <a:lnSpc>
+                <a:spcPct val="108000"/>
+              </a:lnSpc>
+              <a:buNone/>
+              <a:defRPr sz="1350" b="0"/>
+            </a:pPr>
+            <a:r>
+              <a:rPr sz="1350" b="0">
                 <a:solidFill>
                   <a:srgbClr val="000000"/>
                 </a:solidFill>
@@ -12075,10 +12207,14 @@
           <a:lstStyle xmlns:a="http://schemas.openxmlformats.org/drawingml/2006/main"/>
           <a:p xmlns:a="http://schemas.openxmlformats.org/drawingml/2006/main">
             <a:pPr algn="l">
-              <a:buNone/>
-            </a:pPr>
-            <a:r>
-              <a:rPr sz="1575" b="1">
+              <a:lnSpc>
+                <a:spcPct val="108000"/>
+              </a:lnSpc>
+              <a:buNone/>
+              <a:defRPr sz="1350" b="0"/>
+            </a:pPr>
+            <a:r>
+              <a:rPr sz="1350" b="0">
                 <a:solidFill>
                   <a:srgbClr val="3D8DFF"/>
                 </a:solidFill>
@@ -12122,10 +12258,14 @@
           <a:lstStyle xmlns:a="http://schemas.openxmlformats.org/drawingml/2006/main"/>
           <a:p xmlns:a="http://schemas.openxmlformats.org/drawingml/2006/main">
             <a:pPr algn="l">
-              <a:buNone/>
-            </a:pPr>
-            <a:r>
-              <a:rPr sz="1575" b="0">
+              <a:lnSpc>
+                <a:spcPct val="108000"/>
+              </a:lnSpc>
+              <a:buNone/>
+              <a:defRPr sz="1350" b="0"/>
+            </a:pPr>
+            <a:r>
+              <a:rPr sz="1350" b="0">
                 <a:solidFill>
                   <a:srgbClr val="000000"/>
                 </a:solidFill>
@@ -12169,10 +12309,14 @@
           <a:lstStyle xmlns:a="http://schemas.openxmlformats.org/drawingml/2006/main"/>
           <a:p xmlns:a="http://schemas.openxmlformats.org/drawingml/2006/main">
             <a:pPr algn="l">
-              <a:buNone/>
-            </a:pPr>
-            <a:r>
-              <a:rPr sz="1575" b="1">
+              <a:lnSpc>
+                <a:spcPct val="108000"/>
+              </a:lnSpc>
+              <a:buNone/>
+              <a:defRPr sz="1350" b="0"/>
+            </a:pPr>
+            <a:r>
+              <a:rPr sz="1350" b="0">
                 <a:solidFill>
                   <a:srgbClr val="3D8DFF"/>
                 </a:solidFill>
@@ -12216,10 +12360,14 @@
           <a:lstStyle xmlns:a="http://schemas.openxmlformats.org/drawingml/2006/main"/>
           <a:p xmlns:a="http://schemas.openxmlformats.org/drawingml/2006/main">
             <a:pPr algn="l">
-              <a:buNone/>
-            </a:pPr>
-            <a:r>
-              <a:rPr sz="1575" b="0">
+              <a:lnSpc>
+                <a:spcPct val="108000"/>
+              </a:lnSpc>
+              <a:buNone/>
+              <a:defRPr sz="1350" b="0"/>
+            </a:pPr>
+            <a:r>
+              <a:rPr sz="1350" b="0">
                 <a:solidFill>
                   <a:srgbClr val="000000"/>
                 </a:solidFill>
@@ -12412,10 +12560,14 @@
           <a:lstStyle xmlns:a="http://schemas.openxmlformats.org/drawingml/2006/main"/>
           <a:p xmlns:a="http://schemas.openxmlformats.org/drawingml/2006/main">
             <a:pPr algn="l">
-              <a:buNone/>
-            </a:pPr>
-            <a:r>
-              <a:rPr sz="2250" b="1">
+              <a:lnSpc>
+                <a:spcPct val="108000"/>
+              </a:lnSpc>
+              <a:buNone/>
+              <a:defRPr sz="1725" b="1"/>
+            </a:pPr>
+            <a:r>
+              <a:rPr sz="1725" b="1">
                 <a:solidFill>
                   <a:srgbClr val="000000"/>
                 </a:solidFill>
@@ -12459,10 +12611,14 @@
           <a:lstStyle xmlns:a="http://schemas.openxmlformats.org/drawingml/2006/main"/>
           <a:p xmlns:a="http://schemas.openxmlformats.org/drawingml/2006/main">
             <a:pPr algn="l">
-              <a:buNone/>
-            </a:pPr>
-            <a:r>
-              <a:rPr sz="1575" b="1">
+              <a:lnSpc>
+                <a:spcPct val="108000"/>
+              </a:lnSpc>
+              <a:buNone/>
+              <a:defRPr sz="1350" b="0"/>
+            </a:pPr>
+            <a:r>
+              <a:rPr sz="1350" b="0">
                 <a:solidFill>
                   <a:srgbClr val="3D8DFF"/>
                 </a:solidFill>
@@ -12506,10 +12662,14 @@
           <a:lstStyle xmlns:a="http://schemas.openxmlformats.org/drawingml/2006/main"/>
           <a:p xmlns:a="http://schemas.openxmlformats.org/drawingml/2006/main">
             <a:pPr algn="l">
-              <a:buNone/>
-            </a:pPr>
-            <a:r>
-              <a:rPr sz="1575" b="0">
+              <a:lnSpc>
+                <a:spcPct val="108000"/>
+              </a:lnSpc>
+              <a:buNone/>
+              <a:defRPr sz="1350" b="0"/>
+            </a:pPr>
+            <a:r>
+              <a:rPr sz="1350" b="0">
                 <a:solidFill>
                   <a:srgbClr val="000000"/>
                 </a:solidFill>
@@ -12553,10 +12713,14 @@
           <a:lstStyle xmlns:a="http://schemas.openxmlformats.org/drawingml/2006/main"/>
           <a:p xmlns:a="http://schemas.openxmlformats.org/drawingml/2006/main">
             <a:pPr algn="l">
-              <a:buNone/>
-            </a:pPr>
-            <a:r>
-              <a:rPr sz="1575" b="1">
+              <a:lnSpc>
+                <a:spcPct val="108000"/>
+              </a:lnSpc>
+              <a:buNone/>
+              <a:defRPr sz="1350" b="0"/>
+            </a:pPr>
+            <a:r>
+              <a:rPr sz="1350" b="0">
                 <a:solidFill>
                   <a:srgbClr val="3D8DFF"/>
                 </a:solidFill>
@@ -12600,10 +12764,14 @@
           <a:lstStyle xmlns:a="http://schemas.openxmlformats.org/drawingml/2006/main"/>
           <a:p xmlns:a="http://schemas.openxmlformats.org/drawingml/2006/main">
             <a:pPr algn="l">
-              <a:buNone/>
-            </a:pPr>
-            <a:r>
-              <a:rPr sz="1575" b="0">
+              <a:lnSpc>
+                <a:spcPct val="108000"/>
+              </a:lnSpc>
+              <a:buNone/>
+              <a:defRPr sz="1350" b="0"/>
+            </a:pPr>
+            <a:r>
+              <a:rPr sz="1350" b="0">
                 <a:solidFill>
                   <a:srgbClr val="000000"/>
                 </a:solidFill>
@@ -12647,10 +12815,14 @@
           <a:lstStyle xmlns:a="http://schemas.openxmlformats.org/drawingml/2006/main"/>
           <a:p xmlns:a="http://schemas.openxmlformats.org/drawingml/2006/main">
             <a:pPr algn="l">
-              <a:buNone/>
-            </a:pPr>
-            <a:r>
-              <a:rPr sz="1575" b="1">
+              <a:lnSpc>
+                <a:spcPct val="108000"/>
+              </a:lnSpc>
+              <a:buNone/>
+              <a:defRPr sz="1350" b="0"/>
+            </a:pPr>
+            <a:r>
+              <a:rPr sz="1350" b="0">
                 <a:solidFill>
                   <a:srgbClr val="3D8DFF"/>
                 </a:solidFill>
@@ -12694,10 +12866,14 @@
           <a:lstStyle xmlns:a="http://schemas.openxmlformats.org/drawingml/2006/main"/>
           <a:p xmlns:a="http://schemas.openxmlformats.org/drawingml/2006/main">
             <a:pPr algn="l">
-              <a:buNone/>
-            </a:pPr>
-            <a:r>
-              <a:rPr sz="1575" b="0">
+              <a:lnSpc>
+                <a:spcPct val="108000"/>
+              </a:lnSpc>
+              <a:buNone/>
+              <a:defRPr sz="1350" b="0"/>
+            </a:pPr>
+            <a:r>
+              <a:rPr sz="1350" b="0">
                 <a:solidFill>
                   <a:srgbClr val="000000"/>
                 </a:solidFill>
@@ -13537,10 +13713,14 @@
           <a:lstStyle xmlns:a="http://schemas.openxmlformats.org/drawingml/2006/main"/>
           <a:p xmlns:a="http://schemas.openxmlformats.org/drawingml/2006/main">
             <a:pPr algn="l">
-              <a:buNone/>
-            </a:pPr>
-            <a:r>
-              <a:rPr sz="3750" b="1">
+              <a:lnSpc>
+                <a:spcPct val="98000"/>
+              </a:lnSpc>
+              <a:buNone/>
+              <a:defRPr sz="3375" b="1"/>
+            </a:pPr>
+            <a:r>
+              <a:rPr sz="3375" b="1">
                 <a:solidFill>
                   <a:srgbClr val="000000"/>
                 </a:solidFill>
@@ -13639,10 +13819,14 @@
           <a:lstStyle xmlns:a="http://schemas.openxmlformats.org/drawingml/2006/main"/>
           <a:p xmlns:a="http://schemas.openxmlformats.org/drawingml/2006/main">
             <a:pPr algn="l">
-              <a:buNone/>
-            </a:pPr>
-            <a:r>
-              <a:rPr sz="2250" b="1">
+              <a:lnSpc>
+                <a:spcPct val="108000"/>
+              </a:lnSpc>
+              <a:buNone/>
+              <a:defRPr sz="1725" b="1"/>
+            </a:pPr>
+            <a:r>
+              <a:rPr sz="1725" b="1">
                 <a:solidFill>
                   <a:srgbClr val="000000"/>
                 </a:solidFill>
@@ -13686,10 +13870,14 @@
           <a:lstStyle xmlns:a="http://schemas.openxmlformats.org/drawingml/2006/main"/>
           <a:p xmlns:a="http://schemas.openxmlformats.org/drawingml/2006/main">
             <a:pPr algn="l">
-              <a:buNone/>
-            </a:pPr>
-            <a:r>
-              <a:rPr sz="1575" b="1">
+              <a:lnSpc>
+                <a:spcPct val="108000"/>
+              </a:lnSpc>
+              <a:buNone/>
+              <a:defRPr sz="1350" b="0"/>
+            </a:pPr>
+            <a:r>
+              <a:rPr sz="1350" b="0">
                 <a:solidFill>
                   <a:srgbClr val="3D8DFF"/>
                 </a:solidFill>
@@ -13733,10 +13921,14 @@
           <a:lstStyle xmlns:a="http://schemas.openxmlformats.org/drawingml/2006/main"/>
           <a:p xmlns:a="http://schemas.openxmlformats.org/drawingml/2006/main">
             <a:pPr algn="l">
-              <a:buNone/>
-            </a:pPr>
-            <a:r>
-              <a:rPr sz="1575" b="0">
+              <a:lnSpc>
+                <a:spcPct val="108000"/>
+              </a:lnSpc>
+              <a:buNone/>
+              <a:defRPr sz="1350" b="0"/>
+            </a:pPr>
+            <a:r>
+              <a:rPr sz="1350" b="0">
                 <a:solidFill>
                   <a:srgbClr val="000000"/>
                 </a:solidFill>
@@ -13780,10 +13972,14 @@
           <a:lstStyle xmlns:a="http://schemas.openxmlformats.org/drawingml/2006/main"/>
           <a:p xmlns:a="http://schemas.openxmlformats.org/drawingml/2006/main">
             <a:pPr algn="l">
-              <a:buNone/>
-            </a:pPr>
-            <a:r>
-              <a:rPr sz="1575" b="1">
+              <a:lnSpc>
+                <a:spcPct val="108000"/>
+              </a:lnSpc>
+              <a:buNone/>
+              <a:defRPr sz="1350" b="0"/>
+            </a:pPr>
+            <a:r>
+              <a:rPr sz="1350" b="0">
                 <a:solidFill>
                   <a:srgbClr val="3D8DFF"/>
                 </a:solidFill>
@@ -13827,10 +14023,14 @@
           <a:lstStyle xmlns:a="http://schemas.openxmlformats.org/drawingml/2006/main"/>
           <a:p xmlns:a="http://schemas.openxmlformats.org/drawingml/2006/main">
             <a:pPr algn="l">
-              <a:buNone/>
-            </a:pPr>
-            <a:r>
-              <a:rPr sz="1575" b="0">
+              <a:lnSpc>
+                <a:spcPct val="108000"/>
+              </a:lnSpc>
+              <a:buNone/>
+              <a:defRPr sz="1350" b="0"/>
+            </a:pPr>
+            <a:r>
+              <a:rPr sz="1350" b="0">
                 <a:solidFill>
                   <a:srgbClr val="000000"/>
                 </a:solidFill>
@@ -13874,10 +14074,14 @@
           <a:lstStyle xmlns:a="http://schemas.openxmlformats.org/drawingml/2006/main"/>
           <a:p xmlns:a="http://schemas.openxmlformats.org/drawingml/2006/main">
             <a:pPr algn="l">
-              <a:buNone/>
-            </a:pPr>
-            <a:r>
-              <a:rPr sz="1575" b="1">
+              <a:lnSpc>
+                <a:spcPct val="108000"/>
+              </a:lnSpc>
+              <a:buNone/>
+              <a:defRPr sz="1350" b="0"/>
+            </a:pPr>
+            <a:r>
+              <a:rPr sz="1350" b="0">
                 <a:solidFill>
                   <a:srgbClr val="3D8DFF"/>
                 </a:solidFill>
@@ -13921,10 +14125,14 @@
           <a:lstStyle xmlns:a="http://schemas.openxmlformats.org/drawingml/2006/main"/>
           <a:p xmlns:a="http://schemas.openxmlformats.org/drawingml/2006/main">
             <a:pPr algn="l">
-              <a:buNone/>
-            </a:pPr>
-            <a:r>
-              <a:rPr sz="1575" b="0">
+              <a:lnSpc>
+                <a:spcPct val="108000"/>
+              </a:lnSpc>
+              <a:buNone/>
+              <a:defRPr sz="1350" b="0"/>
+            </a:pPr>
+            <a:r>
+              <a:rPr sz="1350" b="0">
                 <a:solidFill>
                   <a:srgbClr val="000000"/>
                 </a:solidFill>
@@ -14023,10 +14231,14 @@
           <a:lstStyle xmlns:a="http://schemas.openxmlformats.org/drawingml/2006/main"/>
           <a:p xmlns:a="http://schemas.openxmlformats.org/drawingml/2006/main">
             <a:pPr algn="l">
-              <a:buNone/>
-            </a:pPr>
-            <a:r>
-              <a:rPr sz="2250" b="1">
+              <a:lnSpc>
+                <a:spcPct val="108000"/>
+              </a:lnSpc>
+              <a:buNone/>
+              <a:defRPr sz="1725" b="1"/>
+            </a:pPr>
+            <a:r>
+              <a:rPr sz="1725" b="1">
                 <a:solidFill>
                   <a:srgbClr val="000000"/>
                 </a:solidFill>
@@ -14070,10 +14282,14 @@
           <a:lstStyle xmlns:a="http://schemas.openxmlformats.org/drawingml/2006/main"/>
           <a:p xmlns:a="http://schemas.openxmlformats.org/drawingml/2006/main">
             <a:pPr algn="l">
-              <a:buNone/>
-            </a:pPr>
-            <a:r>
-              <a:rPr sz="1575" b="1">
+              <a:lnSpc>
+                <a:spcPct val="108000"/>
+              </a:lnSpc>
+              <a:buNone/>
+              <a:defRPr sz="1350" b="0"/>
+            </a:pPr>
+            <a:r>
+              <a:rPr sz="1350" b="0">
                 <a:solidFill>
                   <a:srgbClr val="3D8DFF"/>
                 </a:solidFill>
@@ -14117,10 +14333,14 @@
           <a:lstStyle xmlns:a="http://schemas.openxmlformats.org/drawingml/2006/main"/>
           <a:p xmlns:a="http://schemas.openxmlformats.org/drawingml/2006/main">
             <a:pPr algn="l">
-              <a:buNone/>
-            </a:pPr>
-            <a:r>
-              <a:rPr sz="1575" b="0">
+              <a:lnSpc>
+                <a:spcPct val="108000"/>
+              </a:lnSpc>
+              <a:buNone/>
+              <a:defRPr sz="1350" b="0"/>
+            </a:pPr>
+            <a:r>
+              <a:rPr sz="1350" b="0">
                 <a:solidFill>
                   <a:srgbClr val="000000"/>
                 </a:solidFill>
@@ -14164,10 +14384,14 @@
           <a:lstStyle xmlns:a="http://schemas.openxmlformats.org/drawingml/2006/main"/>
           <a:p xmlns:a="http://schemas.openxmlformats.org/drawingml/2006/main">
             <a:pPr algn="l">
-              <a:buNone/>
-            </a:pPr>
-            <a:r>
-              <a:rPr sz="1575" b="1">
+              <a:lnSpc>
+                <a:spcPct val="108000"/>
+              </a:lnSpc>
+              <a:buNone/>
+              <a:defRPr sz="1350" b="0"/>
+            </a:pPr>
+            <a:r>
+              <a:rPr sz="1350" b="0">
                 <a:solidFill>
                   <a:srgbClr val="3D8DFF"/>
                 </a:solidFill>
@@ -14211,10 +14435,14 @@
           <a:lstStyle xmlns:a="http://schemas.openxmlformats.org/drawingml/2006/main"/>
           <a:p xmlns:a="http://schemas.openxmlformats.org/drawingml/2006/main">
             <a:pPr algn="l">
-              <a:buNone/>
-            </a:pPr>
-            <a:r>
-              <a:rPr sz="1575" b="0">
+              <a:lnSpc>
+                <a:spcPct val="108000"/>
+              </a:lnSpc>
+              <a:buNone/>
+              <a:defRPr sz="1350" b="0"/>
+            </a:pPr>
+            <a:r>
+              <a:rPr sz="1350" b="0">
                 <a:solidFill>
                   <a:srgbClr val="000000"/>
                 </a:solidFill>
@@ -14258,10 +14486,14 @@
           <a:lstStyle xmlns:a="http://schemas.openxmlformats.org/drawingml/2006/main"/>
           <a:p xmlns:a="http://schemas.openxmlformats.org/drawingml/2006/main">
             <a:pPr algn="l">
-              <a:buNone/>
-            </a:pPr>
-            <a:r>
-              <a:rPr sz="1575" b="1">
+              <a:lnSpc>
+                <a:spcPct val="108000"/>
+              </a:lnSpc>
+              <a:buNone/>
+              <a:defRPr sz="1350" b="0"/>
+            </a:pPr>
+            <a:r>
+              <a:rPr sz="1350" b="0">
                 <a:solidFill>
                   <a:srgbClr val="3D8DFF"/>
                 </a:solidFill>
@@ -14305,10 +14537,14 @@
           <a:lstStyle xmlns:a="http://schemas.openxmlformats.org/drawingml/2006/main"/>
           <a:p xmlns:a="http://schemas.openxmlformats.org/drawingml/2006/main">
             <a:pPr algn="l">
-              <a:buNone/>
-            </a:pPr>
-            <a:r>
-              <a:rPr sz="1575" b="0">
+              <a:lnSpc>
+                <a:spcPct val="108000"/>
+              </a:lnSpc>
+              <a:buNone/>
+              <a:defRPr sz="1350" b="0"/>
+            </a:pPr>
+            <a:r>
+              <a:rPr sz="1350" b="0">
                 <a:solidFill>
                   <a:srgbClr val="000000"/>
                 </a:solidFill>
@@ -15853,10 +16089,14 @@
           <a:lstStyle xmlns:a="http://schemas.openxmlformats.org/drawingml/2006/main"/>
           <a:p xmlns:a="http://schemas.openxmlformats.org/drawingml/2006/main">
             <a:pPr algn="l">
-              <a:buNone/>
-            </a:pPr>
-            <a:r>
-              <a:rPr sz="3750" b="1">
+              <a:lnSpc>
+                <a:spcPct val="98000"/>
+              </a:lnSpc>
+              <a:buNone/>
+              <a:defRPr sz="3525" b="1"/>
+            </a:pPr>
+            <a:r>
+              <a:rPr sz="3525" b="1">
                 <a:solidFill>
                   <a:srgbClr val="000000"/>
                 </a:solidFill>
@@ -15885,7 +16125,7 @@
         </p:nvSpPr>
         <p:spPr>
           <a:xfrm xmlns:a="http://schemas.openxmlformats.org/drawingml/2006/main">
-            <a:off x="-76200" y="3314700"/>
+            <a:off x="114300" y="3314700"/>
             <a:ext cx="1981200" cy="1504950"/>
           </a:xfrm>
           <a:prstGeom xmlns:a="http://schemas.openxmlformats.org/drawingml/2006/main" prst="rect">
@@ -15940,7 +16180,7 @@
         </p:nvSpPr>
         <p:spPr>
           <a:xfrm xmlns:a="http://schemas.openxmlformats.org/drawingml/2006/main">
-            <a:off x="19050" y="3694700"/>
+            <a:off x="209550" y="3694700"/>
             <a:ext cx="1790700" cy="400050"/>
           </a:xfrm>
           <a:prstGeom xmlns:a="http://schemas.openxmlformats.org/drawingml/2006/main" prst="rect">
@@ -15955,10 +16195,14 @@
           <a:lstStyle xmlns:a="http://schemas.openxmlformats.org/drawingml/2006/main"/>
           <a:p xmlns:a="http://schemas.openxmlformats.org/drawingml/2006/main">
             <a:pPr algn="ctr">
-              <a:buNone/>
-            </a:pPr>
-            <a:r>
-              <a:rPr sz="2000" b="1">
+              <a:lnSpc>
+                <a:spcPct val="108000"/>
+              </a:lnSpc>
+              <a:buNone/>
+              <a:defRPr sz="1725" b="1"/>
+            </a:pPr>
+            <a:r>
+              <a:rPr sz="1725" b="1">
                 <a:solidFill>
                   <a:srgbClr val="000000"/>
                 </a:solidFill>
@@ -15987,7 +16231,7 @@
         </p:nvSpPr>
         <p:spPr>
           <a:xfrm xmlns:a="http://schemas.openxmlformats.org/drawingml/2006/main">
-            <a:off x="19050" y="4114800"/>
+            <a:off x="209550" y="4114800"/>
             <a:ext cx="1790700" cy="500000"/>
           </a:xfrm>
           <a:prstGeom xmlns:a="http://schemas.openxmlformats.org/drawingml/2006/main" prst="rect">
@@ -16002,7 +16246,11 @@
           <a:lstStyle xmlns:a="http://schemas.openxmlformats.org/drawingml/2006/main"/>
           <a:p xmlns:a="http://schemas.openxmlformats.org/drawingml/2006/main">
             <a:pPr algn="ctr">
-              <a:buNone/>
+              <a:lnSpc>
+                <a:spcPct val="108000"/>
+              </a:lnSpc>
+              <a:buNone/>
+              <a:defRPr sz="1350" b="0"/>
             </a:pPr>
             <a:r>
               <a:rPr sz="1350" b="0">
@@ -16159,10 +16407,14 @@
           <a:lstStyle xmlns:a="http://schemas.openxmlformats.org/drawingml/2006/main"/>
           <a:p xmlns:a="http://schemas.openxmlformats.org/drawingml/2006/main">
             <a:pPr algn="ctr">
-              <a:buNone/>
-            </a:pPr>
-            <a:r>
-              <a:rPr sz="2000" b="1">
+              <a:lnSpc>
+                <a:spcPct val="108000"/>
+              </a:lnSpc>
+              <a:buNone/>
+              <a:defRPr sz="1725" b="1"/>
+            </a:pPr>
+            <a:r>
+              <a:rPr sz="1725" b="1">
                 <a:solidFill>
                   <a:srgbClr val="000000"/>
                 </a:solidFill>
@@ -16206,7 +16458,11 @@
           <a:lstStyle xmlns:a="http://schemas.openxmlformats.org/drawingml/2006/main"/>
           <a:p xmlns:a="http://schemas.openxmlformats.org/drawingml/2006/main">
             <a:pPr algn="ctr">
-              <a:buNone/>
+              <a:lnSpc>
+                <a:spcPct val="108000"/>
+              </a:lnSpc>
+              <a:buNone/>
+              <a:defRPr sz="1350" b="0"/>
             </a:pPr>
             <a:r>
               <a:rPr sz="1350" b="0">
@@ -16363,10 +16619,14 @@
           <a:lstStyle xmlns:a="http://schemas.openxmlformats.org/drawingml/2006/main"/>
           <a:p xmlns:a="http://schemas.openxmlformats.org/drawingml/2006/main">
             <a:pPr algn="ctr">
-              <a:buNone/>
-            </a:pPr>
-            <a:r>
-              <a:rPr sz="2000" b="1">
+              <a:lnSpc>
+                <a:spcPct val="108000"/>
+              </a:lnSpc>
+              <a:buNone/>
+              <a:defRPr sz="1725" b="1"/>
+            </a:pPr>
+            <a:r>
+              <a:rPr sz="1725" b="1">
                 <a:solidFill>
                   <a:srgbClr val="000000"/>
                 </a:solidFill>
@@ -16410,7 +16670,11 @@
           <a:lstStyle xmlns:a="http://schemas.openxmlformats.org/drawingml/2006/main"/>
           <a:p xmlns:a="http://schemas.openxmlformats.org/drawingml/2006/main">
             <a:pPr algn="ctr">
-              <a:buNone/>
+              <a:lnSpc>
+                <a:spcPct val="108000"/>
+              </a:lnSpc>
+              <a:buNone/>
+              <a:defRPr sz="1350" b="0"/>
             </a:pPr>
             <a:r>
               <a:rPr sz="1350" b="0">
@@ -16567,10 +16831,14 @@
           <a:lstStyle xmlns:a="http://schemas.openxmlformats.org/drawingml/2006/main"/>
           <a:p xmlns:a="http://schemas.openxmlformats.org/drawingml/2006/main">
             <a:pPr algn="ctr">
-              <a:buNone/>
-            </a:pPr>
-            <a:r>
-              <a:rPr sz="2000" b="1">
+              <a:lnSpc>
+                <a:spcPct val="108000"/>
+              </a:lnSpc>
+              <a:buNone/>
+              <a:defRPr sz="1725" b="1"/>
+            </a:pPr>
+            <a:r>
+              <a:rPr sz="1725" b="1">
                 <a:solidFill>
                   <a:srgbClr val="000000"/>
                 </a:solidFill>
@@ -16614,7 +16882,11 @@
           <a:lstStyle xmlns:a="http://schemas.openxmlformats.org/drawingml/2006/main"/>
           <a:p xmlns:a="http://schemas.openxmlformats.org/drawingml/2006/main">
             <a:pPr algn="ctr">
-              <a:buNone/>
+              <a:lnSpc>
+                <a:spcPct val="108000"/>
+              </a:lnSpc>
+              <a:buNone/>
+              <a:defRPr sz="1350" b="0"/>
             </a:pPr>
             <a:r>
               <a:rPr sz="1350" b="0">
@@ -16701,7 +16973,7 @@
         </p:nvSpPr>
         <p:spPr>
           <a:xfrm xmlns:a="http://schemas.openxmlformats.org/drawingml/2006/main">
-            <a:off x="10287000" y="3314700"/>
+            <a:off x="10096500" y="3314700"/>
             <a:ext cx="1981200" cy="1504950"/>
           </a:xfrm>
           <a:prstGeom xmlns:a="http://schemas.openxmlformats.org/drawingml/2006/main" prst="rect">
@@ -16756,7 +17028,7 @@
         </p:nvSpPr>
         <p:spPr>
           <a:xfrm xmlns:a="http://schemas.openxmlformats.org/drawingml/2006/main">
-            <a:off x="10382250" y="3694700"/>
+            <a:off x="10191750" y="3694700"/>
             <a:ext cx="1790700" cy="400050"/>
           </a:xfrm>
           <a:prstGeom xmlns:a="http://schemas.openxmlformats.org/drawingml/2006/main" prst="rect">
@@ -16771,10 +17043,14 @@
           <a:lstStyle xmlns:a="http://schemas.openxmlformats.org/drawingml/2006/main"/>
           <a:p xmlns:a="http://schemas.openxmlformats.org/drawingml/2006/main">
             <a:pPr algn="ctr">
-              <a:buNone/>
-            </a:pPr>
-            <a:r>
-              <a:rPr sz="2000" b="1">
+              <a:lnSpc>
+                <a:spcPct val="108000"/>
+              </a:lnSpc>
+              <a:buNone/>
+              <a:defRPr sz="1725" b="1"/>
+            </a:pPr>
+            <a:r>
+              <a:rPr sz="1725" b="1">
                 <a:solidFill>
                   <a:srgbClr val="000000"/>
                 </a:solidFill>
@@ -16803,7 +17079,7 @@
         </p:nvSpPr>
         <p:spPr>
           <a:xfrm xmlns:a="http://schemas.openxmlformats.org/drawingml/2006/main">
-            <a:off x="10382250" y="4114800"/>
+            <a:off x="10191750" y="4114800"/>
             <a:ext cx="1790700" cy="500000"/>
           </a:xfrm>
           <a:prstGeom xmlns:a="http://schemas.openxmlformats.org/drawingml/2006/main" prst="rect">
@@ -16818,7 +17094,11 @@
           <a:lstStyle xmlns:a="http://schemas.openxmlformats.org/drawingml/2006/main"/>
           <a:p xmlns:a="http://schemas.openxmlformats.org/drawingml/2006/main">
             <a:pPr algn="ctr">
-              <a:buNone/>
+              <a:lnSpc>
+                <a:spcPct val="108000"/>
+              </a:lnSpc>
+              <a:buNone/>
+              <a:defRPr sz="1350" b="0"/>
             </a:pPr>
             <a:r>
               <a:rPr sz="1350" b="0">
@@ -16850,8 +17130,8 @@
         </p:nvSpPr>
         <p:spPr>
           <a:xfrm xmlns:a="http://schemas.openxmlformats.org/drawingml/2006/main">
-            <a:off x="1676400" y="5181600"/>
-            <a:ext cx="8839200" cy="600075"/>
+            <a:off x="1676400" y="5448300"/>
+            <a:ext cx="8839200" cy="457200"/>
           </a:xfrm>
           <a:prstGeom xmlns:a="http://schemas.openxmlformats.org/drawingml/2006/main" prst="rect">
             <a:avLst/>
@@ -16865,10 +17145,14 @@
           <a:lstStyle xmlns:a="http://schemas.openxmlformats.org/drawingml/2006/main"/>
           <a:p xmlns:a="http://schemas.openxmlformats.org/drawingml/2006/main">
             <a:pPr algn="ctr">
-              <a:buNone/>
-            </a:pPr>
-            <a:r>
-              <a:rPr sz="2100" b="1">
+              <a:lnSpc>
+                <a:spcPct val="105000"/>
+              </a:lnSpc>
+              <a:buNone/>
+              <a:defRPr sz="1500"/>
+            </a:pPr>
+            <a:r>
+              <a:rPr sz="1500" b="1">
                 <a:solidFill>
                   <a:srgbClr val="000000"/>
                 </a:solidFill>
@@ -17028,10 +17312,14 @@
           <a:lstStyle xmlns:a="http://schemas.openxmlformats.org/drawingml/2006/main"/>
           <a:p xmlns:a="http://schemas.openxmlformats.org/drawingml/2006/main">
             <a:pPr algn="l">
-              <a:buNone/>
-            </a:pPr>
-            <a:r>
-              <a:rPr sz="3750" b="1">
+              <a:lnSpc>
+                <a:spcPct val="98000"/>
+              </a:lnSpc>
+              <a:buNone/>
+              <a:defRPr sz="3525" b="1"/>
+            </a:pPr>
+            <a:r>
+              <a:rPr sz="3525" b="1">
                 <a:solidFill>
                   <a:srgbClr val="000000"/>
                 </a:solidFill>
@@ -17130,10 +17418,14 @@
           <a:lstStyle xmlns:a="http://schemas.openxmlformats.org/drawingml/2006/main"/>
           <a:p xmlns:a="http://schemas.openxmlformats.org/drawingml/2006/main">
             <a:pPr algn="l">
-              <a:buNone/>
-            </a:pPr>
-            <a:r>
-              <a:rPr sz="2250" b="1">
+              <a:lnSpc>
+                <a:spcPct val="108000"/>
+              </a:lnSpc>
+              <a:buNone/>
+              <a:defRPr sz="1725" b="1"/>
+            </a:pPr>
+            <a:r>
+              <a:rPr sz="1725" b="1">
                 <a:solidFill>
                   <a:srgbClr val="000000"/>
                 </a:solidFill>
@@ -17177,10 +17469,14 @@
           <a:lstStyle xmlns:a="http://schemas.openxmlformats.org/drawingml/2006/main"/>
           <a:p xmlns:a="http://schemas.openxmlformats.org/drawingml/2006/main">
             <a:pPr algn="l">
-              <a:buNone/>
-            </a:pPr>
-            <a:r>
-              <a:rPr sz="1575" b="1">
+              <a:lnSpc>
+                <a:spcPct val="108000"/>
+              </a:lnSpc>
+              <a:buNone/>
+              <a:defRPr sz="1350" b="0"/>
+            </a:pPr>
+            <a:r>
+              <a:rPr sz="1350" b="0">
                 <a:solidFill>
                   <a:srgbClr val="3D8DFF"/>
                 </a:solidFill>
@@ -17224,10 +17520,14 @@
           <a:lstStyle xmlns:a="http://schemas.openxmlformats.org/drawingml/2006/main"/>
           <a:p xmlns:a="http://schemas.openxmlformats.org/drawingml/2006/main">
             <a:pPr algn="l">
-              <a:buNone/>
-            </a:pPr>
-            <a:r>
-              <a:rPr sz="1575" b="0">
+              <a:lnSpc>
+                <a:spcPct val="108000"/>
+              </a:lnSpc>
+              <a:buNone/>
+              <a:defRPr sz="1350" b="0"/>
+            </a:pPr>
+            <a:r>
+              <a:rPr sz="1350" b="0">
                 <a:solidFill>
                   <a:srgbClr val="000000"/>
                 </a:solidFill>
@@ -17271,10 +17571,14 @@
           <a:lstStyle xmlns:a="http://schemas.openxmlformats.org/drawingml/2006/main"/>
           <a:p xmlns:a="http://schemas.openxmlformats.org/drawingml/2006/main">
             <a:pPr algn="l">
-              <a:buNone/>
-            </a:pPr>
-            <a:r>
-              <a:rPr sz="1575" b="1">
+              <a:lnSpc>
+                <a:spcPct val="108000"/>
+              </a:lnSpc>
+              <a:buNone/>
+              <a:defRPr sz="1350" b="0"/>
+            </a:pPr>
+            <a:r>
+              <a:rPr sz="1350" b="0">
                 <a:solidFill>
                   <a:srgbClr val="3D8DFF"/>
                 </a:solidFill>
@@ -17318,10 +17622,14 @@
           <a:lstStyle xmlns:a="http://schemas.openxmlformats.org/drawingml/2006/main"/>
           <a:p xmlns:a="http://schemas.openxmlformats.org/drawingml/2006/main">
             <a:pPr algn="l">
-              <a:buNone/>
-            </a:pPr>
-            <a:r>
-              <a:rPr sz="1575" b="0">
+              <a:lnSpc>
+                <a:spcPct val="108000"/>
+              </a:lnSpc>
+              <a:buNone/>
+              <a:defRPr sz="1350" b="0"/>
+            </a:pPr>
+            <a:r>
+              <a:rPr sz="1350" b="0">
                 <a:solidFill>
                   <a:srgbClr val="000000"/>
                 </a:solidFill>
@@ -17365,10 +17673,14 @@
           <a:lstStyle xmlns:a="http://schemas.openxmlformats.org/drawingml/2006/main"/>
           <a:p xmlns:a="http://schemas.openxmlformats.org/drawingml/2006/main">
             <a:pPr algn="l">
-              <a:buNone/>
-            </a:pPr>
-            <a:r>
-              <a:rPr sz="1575" b="1">
+              <a:lnSpc>
+                <a:spcPct val="108000"/>
+              </a:lnSpc>
+              <a:buNone/>
+              <a:defRPr sz="1350" b="0"/>
+            </a:pPr>
+            <a:r>
+              <a:rPr sz="1350" b="0">
                 <a:solidFill>
                   <a:srgbClr val="3D8DFF"/>
                 </a:solidFill>
@@ -17412,10 +17724,14 @@
           <a:lstStyle xmlns:a="http://schemas.openxmlformats.org/drawingml/2006/main"/>
           <a:p xmlns:a="http://schemas.openxmlformats.org/drawingml/2006/main">
             <a:pPr algn="l">
-              <a:buNone/>
-            </a:pPr>
-            <a:r>
-              <a:rPr sz="1575" b="0">
+              <a:lnSpc>
+                <a:spcPct val="108000"/>
+              </a:lnSpc>
+              <a:buNone/>
+              <a:defRPr sz="1350" b="0"/>
+            </a:pPr>
+            <a:r>
+              <a:rPr sz="1350" b="0">
                 <a:solidFill>
                   <a:srgbClr val="000000"/>
                 </a:solidFill>
@@ -17514,10 +17830,14 @@
           <a:lstStyle xmlns:a="http://schemas.openxmlformats.org/drawingml/2006/main"/>
           <a:p xmlns:a="http://schemas.openxmlformats.org/drawingml/2006/main">
             <a:pPr algn="l">
-              <a:buNone/>
-            </a:pPr>
-            <a:r>
-              <a:rPr sz="2250" b="1">
+              <a:lnSpc>
+                <a:spcPct val="108000"/>
+              </a:lnSpc>
+              <a:buNone/>
+              <a:defRPr sz="1725" b="1"/>
+            </a:pPr>
+            <a:r>
+              <a:rPr sz="1725" b="1">
                 <a:solidFill>
                   <a:srgbClr val="000000"/>
                 </a:solidFill>
@@ -17561,10 +17881,14 @@
           <a:lstStyle xmlns:a="http://schemas.openxmlformats.org/drawingml/2006/main"/>
           <a:p xmlns:a="http://schemas.openxmlformats.org/drawingml/2006/main">
             <a:pPr algn="l">
-              <a:buNone/>
-            </a:pPr>
-            <a:r>
-              <a:rPr sz="1575" b="1">
+              <a:lnSpc>
+                <a:spcPct val="108000"/>
+              </a:lnSpc>
+              <a:buNone/>
+              <a:defRPr sz="1350" b="0"/>
+            </a:pPr>
+            <a:r>
+              <a:rPr sz="1350" b="0">
                 <a:solidFill>
                   <a:srgbClr val="3D8DFF"/>
                 </a:solidFill>
@@ -17608,10 +17932,14 @@
           <a:lstStyle xmlns:a="http://schemas.openxmlformats.org/drawingml/2006/main"/>
           <a:p xmlns:a="http://schemas.openxmlformats.org/drawingml/2006/main">
             <a:pPr algn="l">
-              <a:buNone/>
-            </a:pPr>
-            <a:r>
-              <a:rPr sz="1575" b="0">
+              <a:lnSpc>
+                <a:spcPct val="108000"/>
+              </a:lnSpc>
+              <a:buNone/>
+              <a:defRPr sz="1350" b="0"/>
+            </a:pPr>
+            <a:r>
+              <a:rPr sz="1350" b="0">
                 <a:solidFill>
                   <a:srgbClr val="000000"/>
                 </a:solidFill>
@@ -17655,10 +17983,14 @@
           <a:lstStyle xmlns:a="http://schemas.openxmlformats.org/drawingml/2006/main"/>
           <a:p xmlns:a="http://schemas.openxmlformats.org/drawingml/2006/main">
             <a:pPr algn="l">
-              <a:buNone/>
-            </a:pPr>
-            <a:r>
-              <a:rPr sz="1575" b="1">
+              <a:lnSpc>
+                <a:spcPct val="108000"/>
+              </a:lnSpc>
+              <a:buNone/>
+              <a:defRPr sz="1350" b="0"/>
+            </a:pPr>
+            <a:r>
+              <a:rPr sz="1350" b="0">
                 <a:solidFill>
                   <a:srgbClr val="3D8DFF"/>
                 </a:solidFill>
@@ -17702,10 +18034,14 @@
           <a:lstStyle xmlns:a="http://schemas.openxmlformats.org/drawingml/2006/main"/>
           <a:p xmlns:a="http://schemas.openxmlformats.org/drawingml/2006/main">
             <a:pPr algn="l">
-              <a:buNone/>
-            </a:pPr>
-            <a:r>
-              <a:rPr sz="1575" b="0">
+              <a:lnSpc>
+                <a:spcPct val="108000"/>
+              </a:lnSpc>
+              <a:buNone/>
+              <a:defRPr sz="1350" b="0"/>
+            </a:pPr>
+            <a:r>
+              <a:rPr sz="1350" b="0">
                 <a:solidFill>
                   <a:srgbClr val="000000"/>
                 </a:solidFill>
@@ -17749,10 +18085,14 @@
           <a:lstStyle xmlns:a="http://schemas.openxmlformats.org/drawingml/2006/main"/>
           <a:p xmlns:a="http://schemas.openxmlformats.org/drawingml/2006/main">
             <a:pPr algn="l">
-              <a:buNone/>
-            </a:pPr>
-            <a:r>
-              <a:rPr sz="1575" b="1">
+              <a:lnSpc>
+                <a:spcPct val="108000"/>
+              </a:lnSpc>
+              <a:buNone/>
+              <a:defRPr sz="1350" b="0"/>
+            </a:pPr>
+            <a:r>
+              <a:rPr sz="1350" b="0">
                 <a:solidFill>
                   <a:srgbClr val="3D8DFF"/>
                 </a:solidFill>
@@ -17796,10 +18136,14 @@
           <a:lstStyle xmlns:a="http://schemas.openxmlformats.org/drawingml/2006/main"/>
           <a:p xmlns:a="http://schemas.openxmlformats.org/drawingml/2006/main">
             <a:pPr algn="l">
-              <a:buNone/>
-            </a:pPr>
-            <a:r>
-              <a:rPr sz="1575" b="0">
+              <a:lnSpc>
+                <a:spcPct val="108000"/>
+              </a:lnSpc>
+              <a:buNone/>
+              <a:defRPr sz="1350" b="0"/>
+            </a:pPr>
+            <a:r>
+              <a:rPr sz="1350" b="0">
                 <a:solidFill>
                   <a:srgbClr val="000000"/>
                 </a:solidFill>
@@ -17828,8 +18172,8 @@
         </p:nvSpPr>
         <p:spPr>
           <a:xfrm xmlns:a="http://schemas.openxmlformats.org/drawingml/2006/main">
-            <a:off x="1676400" y="5181600"/>
-            <a:ext cx="8839200" cy="600075"/>
+            <a:off x="1676400" y="5448300"/>
+            <a:ext cx="8839200" cy="457200"/>
           </a:xfrm>
           <a:prstGeom xmlns:a="http://schemas.openxmlformats.org/drawingml/2006/main" prst="rect">
             <a:avLst/>
@@ -17843,10 +18187,14 @@
           <a:lstStyle xmlns:a="http://schemas.openxmlformats.org/drawingml/2006/main"/>
           <a:p xmlns:a="http://schemas.openxmlformats.org/drawingml/2006/main">
             <a:pPr algn="ctr">
-              <a:buNone/>
-            </a:pPr>
-            <a:r>
-              <a:rPr sz="2100" b="1">
+              <a:lnSpc>
+                <a:spcPct val="105000"/>
+              </a:lnSpc>
+              <a:buNone/>
+              <a:defRPr sz="1500"/>
+            </a:pPr>
+            <a:r>
+              <a:rPr sz="1500" b="1">
                 <a:solidFill>
                   <a:srgbClr val="000000"/>
                 </a:solidFill>
@@ -18545,10 +18893,14 @@
           <a:lstStyle xmlns:a="http://schemas.openxmlformats.org/drawingml/2006/main"/>
           <a:p xmlns:a="http://schemas.openxmlformats.org/drawingml/2006/main">
             <a:pPr algn="l">
-              <a:buNone/>
-            </a:pPr>
-            <a:r>
-              <a:rPr sz="3750" b="1">
+              <a:lnSpc>
+                <a:spcPct val="98000"/>
+              </a:lnSpc>
+              <a:buNone/>
+              <a:defRPr sz="3525" b="1"/>
+            </a:pPr>
+            <a:r>
+              <a:rPr sz="3525" b="1">
                 <a:solidFill>
                   <a:srgbClr val="000000"/>
                 </a:solidFill>
@@ -18647,10 +18999,14 @@
           <a:lstStyle xmlns:a="http://schemas.openxmlformats.org/drawingml/2006/main"/>
           <a:p xmlns:a="http://schemas.openxmlformats.org/drawingml/2006/main">
             <a:pPr algn="l">
-              <a:buNone/>
-            </a:pPr>
-            <a:r>
-              <a:rPr sz="2000" b="1">
+              <a:lnSpc>
+                <a:spcPct val="108000"/>
+              </a:lnSpc>
+              <a:buNone/>
+              <a:defRPr sz="1725" b="1"/>
+            </a:pPr>
+            <a:r>
+              <a:rPr sz="1725" b="1">
                 <a:solidFill>
                   <a:srgbClr val="000000"/>
                 </a:solidFill>
@@ -18694,10 +19050,14 @@
           <a:lstStyle xmlns:a="http://schemas.openxmlformats.org/drawingml/2006/main"/>
           <a:p xmlns:a="http://schemas.openxmlformats.org/drawingml/2006/main">
             <a:pPr algn="l">
-              <a:buNone/>
-            </a:pPr>
-            <a:r>
-              <a:rPr sz="1575" b="0">
+              <a:lnSpc>
+                <a:spcPct val="112000"/>
+              </a:lnSpc>
+              <a:buNone/>
+              <a:defRPr sz="1350"/>
+            </a:pPr>
+            <a:r>
+              <a:rPr sz="1350" b="0">
                 <a:solidFill>
                   <a:srgbClr val="60646C"/>
                 </a:solidFill>
@@ -18796,10 +19156,14 @@
           <a:lstStyle xmlns:a="http://schemas.openxmlformats.org/drawingml/2006/main"/>
           <a:p xmlns:a="http://schemas.openxmlformats.org/drawingml/2006/main">
             <a:pPr algn="l">
-              <a:buNone/>
-            </a:pPr>
-            <a:r>
-              <a:rPr sz="2000" b="1">
+              <a:lnSpc>
+                <a:spcPct val="108000"/>
+              </a:lnSpc>
+              <a:buNone/>
+              <a:defRPr sz="1725" b="1"/>
+            </a:pPr>
+            <a:r>
+              <a:rPr sz="1725" b="1">
                 <a:solidFill>
                   <a:srgbClr val="000000"/>
                 </a:solidFill>
@@ -18843,10 +19207,14 @@
           <a:lstStyle xmlns:a="http://schemas.openxmlformats.org/drawingml/2006/main"/>
           <a:p xmlns:a="http://schemas.openxmlformats.org/drawingml/2006/main">
             <a:pPr algn="l">
-              <a:buNone/>
-            </a:pPr>
-            <a:r>
-              <a:rPr sz="1575" b="0">
+              <a:lnSpc>
+                <a:spcPct val="112000"/>
+              </a:lnSpc>
+              <a:buNone/>
+              <a:defRPr sz="1350"/>
+            </a:pPr>
+            <a:r>
+              <a:rPr sz="1350" b="0">
                 <a:solidFill>
                   <a:srgbClr val="60646C"/>
                 </a:solidFill>
@@ -18945,10 +19313,14 @@
           <a:lstStyle xmlns:a="http://schemas.openxmlformats.org/drawingml/2006/main"/>
           <a:p xmlns:a="http://schemas.openxmlformats.org/drawingml/2006/main">
             <a:pPr algn="l">
-              <a:buNone/>
-            </a:pPr>
-            <a:r>
-              <a:rPr sz="2000" b="1">
+              <a:lnSpc>
+                <a:spcPct val="108000"/>
+              </a:lnSpc>
+              <a:buNone/>
+              <a:defRPr sz="1725" b="1"/>
+            </a:pPr>
+            <a:r>
+              <a:rPr sz="1725" b="1">
                 <a:solidFill>
                   <a:srgbClr val="000000"/>
                 </a:solidFill>
@@ -18992,10 +19364,14 @@
           <a:lstStyle xmlns:a="http://schemas.openxmlformats.org/drawingml/2006/main"/>
           <a:p xmlns:a="http://schemas.openxmlformats.org/drawingml/2006/main">
             <a:pPr algn="l">
-              <a:buNone/>
-            </a:pPr>
-            <a:r>
-              <a:rPr sz="1575" b="0">
+              <a:lnSpc>
+                <a:spcPct val="112000"/>
+              </a:lnSpc>
+              <a:buNone/>
+              <a:defRPr sz="1350"/>
+            </a:pPr>
+            <a:r>
+              <a:rPr sz="1350" b="0">
                 <a:solidFill>
                   <a:srgbClr val="60646C"/>
                 </a:solidFill>
@@ -19024,8 +19400,8 @@
         </p:nvSpPr>
         <p:spPr>
           <a:xfrm xmlns:a="http://schemas.openxmlformats.org/drawingml/2006/main">
-            <a:off x="1676400" y="5181600"/>
-            <a:ext cx="8839200" cy="600075"/>
+            <a:off x="1676400" y="5448300"/>
+            <a:ext cx="8839200" cy="457200"/>
           </a:xfrm>
           <a:prstGeom xmlns:a="http://schemas.openxmlformats.org/drawingml/2006/main" prst="rect">
             <a:avLst/>
@@ -19039,10 +19415,14 @@
           <a:lstStyle xmlns:a="http://schemas.openxmlformats.org/drawingml/2006/main"/>
           <a:p xmlns:a="http://schemas.openxmlformats.org/drawingml/2006/main">
             <a:pPr algn="ctr">
-              <a:buNone/>
-            </a:pPr>
-            <a:r>
-              <a:rPr sz="2100" b="1">
+              <a:lnSpc>
+                <a:spcPct val="105000"/>
+              </a:lnSpc>
+              <a:buNone/>
+              <a:defRPr sz="1500"/>
+            </a:pPr>
+            <a:r>
+              <a:rPr sz="1500" b="1">
                 <a:solidFill>
                   <a:srgbClr val="000000"/>
                 </a:solidFill>
